--- a/textbook/ppt/chapter10_ppt.pptx
+++ b/textbook/ppt/chapter10_ppt.pptx
@@ -7,6 +7,12 @@
   <p:sldIdLst>
     <p:sldId id="256" r:id="rId7"/>
     <p:sldId id="257" r:id="rId8"/>
+    <p:sldId id="258" r:id="rId9"/>
+    <p:sldId id="259" r:id="rId10"/>
+    <p:sldId id="260" r:id="rId11"/>
+    <p:sldId id="261" r:id="rId12"/>
+    <p:sldId id="262" r:id="rId13"/>
+    <p:sldId id="263" r:id="rId14"/>
   </p:sldIdLst>
   <p:sldSz cx="12188952" cy="6858000" type="screen4x3"/>
   <p:notesSz cx="6858000" cy="9144000"/>
@@ -3229,6 +3235,633 @@
             <a:r>
               <a:rPr sz="1800"/>
               <a:t>• 滑动窗口的基本概念与应用</a:t>
+            </a:r>
+          </a:p>
+        </p:txBody>
+      </p:sp>
+    </p:spTree>
+  </p:cSld>
+  <p:clrMapOvr>
+    <a:masterClrMapping/>
+  </p:clrMapOvr>
+</p:sld>
+</file>
+
+<file path=ppt/slides/slide3.xml><?xml version="1.0" encoding="utf-8"?>
+<p:sld xmlns:a="http://schemas.openxmlformats.org/drawingml/2006/main" xmlns:p="http://schemas.openxmlformats.org/presentationml/2006/main" xmlns:r="http://schemas.openxmlformats.org/officeDocument/2006/relationships">
+  <p:cSld>
+    <p:spTree>
+      <p:nvGrpSpPr>
+        <p:cNvPr id="1" name=""/>
+        <p:cNvGrpSpPr/>
+        <p:nvPr/>
+      </p:nvGrpSpPr>
+      <p:grpSpPr/>
+      <p:sp>
+        <p:nvSpPr>
+          <p:cNvPr id="2" name="TextBox 1"/>
+          <p:cNvSpPr txBox="1"/>
+          <p:nvPr/>
+        </p:nvSpPr>
+        <p:spPr>
+          <a:xfrm>
+            <a:off x="914400" y="457200"/>
+            <a:ext cx="10058400" cy="914400"/>
+          </a:xfrm>
+          <a:prstGeom prst="rect">
+            <a:avLst/>
+          </a:prstGeom>
+          <a:noFill/>
+        </p:spPr>
+        <p:txBody>
+          <a:bodyPr wrap="none">
+            <a:spAutoFit/>
+          </a:bodyPr>
+          <a:lstStyle/>
+          <a:p>
+            <a:r>
+              <a:rPr sz="2800" b="1">
+                <a:solidFill>
+                  <a:srgbClr val="8B0000"/>
+                </a:solidFill>
+              </a:rPr>
+              <a:t>本章概览</a:t>
+            </a:r>
+          </a:p>
+        </p:txBody>
+      </p:sp>
+      <p:sp>
+        <p:nvSpPr>
+          <p:cNvPr id="3" name="TextBox 2"/>
+          <p:cNvSpPr txBox="1"/>
+          <p:nvPr/>
+        </p:nvSpPr>
+        <p:spPr>
+          <a:xfrm>
+            <a:off x="914400" y="1371600"/>
+            <a:ext cx="10058400" cy="5029200"/>
+          </a:xfrm>
+          <a:prstGeom prst="rect">
+            <a:avLst/>
+          </a:prstGeom>
+          <a:noFill/>
+        </p:spPr>
+        <p:txBody>
+          <a:bodyPr wrap="none">
+            <a:spAutoFit/>
+          </a:bodyPr>
+          <a:lstStyle/>
+          <a:p/>
+          <a:p>
+            <a:r>
+              <a:rPr sz="1600">
+                <a:solidFill>
+                  <a:srgbClr val="000000"/>
+                </a:solidFill>
+              </a:rPr>
+              <a:t>高精度：用数组存每一位，模拟竖式运算</a:t>
+            </a:r>
+          </a:p>
+          <a:p>
+            <a:r>
+              <a:rPr sz="1600">
+                <a:solidFill>
+                  <a:srgbClr val="000000"/>
+                </a:solidFill>
+              </a:rPr>
+              <a:t>位运算：&amp;、|、^、~、&lt;&lt;、&gt;&gt;</a:t>
+            </a:r>
+          </a:p>
+          <a:p>
+            <a:r>
+              <a:rPr sz="1600">
+                <a:solidFill>
+                  <a:srgbClr val="000000"/>
+                </a:solidFill>
+              </a:rPr>
+              <a:t>双指针：两个指针配合遍历</a:t>
+            </a:r>
+          </a:p>
+          <a:p>
+            <a:r>
+              <a:rPr sz="1600">
+                <a:solidFill>
+                  <a:srgbClr val="000000"/>
+                </a:solidFill>
+              </a:rPr>
+              <a:t>滑动窗口：维护区间信息</a:t>
+            </a:r>
+          </a:p>
+        </p:txBody>
+      </p:sp>
+    </p:spTree>
+  </p:cSld>
+  <p:clrMapOvr>
+    <a:masterClrMapping/>
+  </p:clrMapOvr>
+</p:sld>
+</file>
+
+<file path=ppt/slides/slide4.xml><?xml version="1.0" encoding="utf-8"?>
+<p:sld xmlns:a="http://schemas.openxmlformats.org/drawingml/2006/main" xmlns:p="http://schemas.openxmlformats.org/presentationml/2006/main" xmlns:r="http://schemas.openxmlformats.org/officeDocument/2006/relationships">
+  <p:cSld>
+    <p:spTree>
+      <p:nvGrpSpPr>
+        <p:cNvPr id="1" name=""/>
+        <p:cNvGrpSpPr/>
+        <p:nvPr/>
+      </p:nvGrpSpPr>
+      <p:grpSpPr/>
+      <p:sp>
+        <p:nvSpPr>
+          <p:cNvPr id="2" name="TextBox 1"/>
+          <p:cNvSpPr txBox="1"/>
+          <p:nvPr/>
+        </p:nvSpPr>
+        <p:spPr>
+          <a:xfrm>
+            <a:off x="914400" y="457200"/>
+            <a:ext cx="10058400" cy="914400"/>
+          </a:xfrm>
+          <a:prstGeom prst="rect">
+            <a:avLst/>
+          </a:prstGeom>
+          <a:noFill/>
+        </p:spPr>
+        <p:txBody>
+          <a:bodyPr wrap="none">
+            <a:spAutoFit/>
+          </a:bodyPr>
+          <a:lstStyle/>
+          <a:p>
+            <a:r>
+              <a:rPr sz="2800" b="1">
+                <a:solidFill>
+                  <a:srgbClr val="8B0000"/>
+                </a:solidFill>
+              </a:rPr>
+              <a:t>C++ 代码示例</a:t>
+            </a:r>
+          </a:p>
+        </p:txBody>
+      </p:sp>
+      <p:sp>
+        <p:nvSpPr>
+          <p:cNvPr id="3" name="TextBox 2"/>
+          <p:cNvSpPr txBox="1"/>
+          <p:nvPr/>
+        </p:nvSpPr>
+        <p:spPr>
+          <a:xfrm>
+            <a:off x="914400" y="1371600"/>
+            <a:ext cx="10058400" cy="5029200"/>
+          </a:xfrm>
+          <a:prstGeom prst="rect">
+            <a:avLst/>
+          </a:prstGeom>
+          <a:noFill/>
+        </p:spPr>
+        <p:txBody>
+          <a:bodyPr wrap="none">
+            <a:spAutoFit/>
+          </a:bodyPr>
+          <a:lstStyle/>
+          <a:p/>
+          <a:p>
+            <a:r>
+              <a:rPr sz="1400">
+                <a:solidFill>
+                  <a:srgbClr val="000000"/>
+                </a:solidFill>
+              </a:rPr>
+              <a:t>int lowbit(int x) { return x &amp; -x; }
+// 统计二进制中1的个数
+int count = 0;
+while (x) { x -= x &amp; -x; count++; }</a:t>
+            </a:r>
+          </a:p>
+        </p:txBody>
+      </p:sp>
+    </p:spTree>
+  </p:cSld>
+  <p:clrMapOvr>
+    <a:masterClrMapping/>
+  </p:clrMapOvr>
+</p:sld>
+</file>
+
+<file path=ppt/slides/slide5.xml><?xml version="1.0" encoding="utf-8"?>
+<p:sld xmlns:a="http://schemas.openxmlformats.org/drawingml/2006/main" xmlns:p="http://schemas.openxmlformats.org/presentationml/2006/main" xmlns:r="http://schemas.openxmlformats.org/officeDocument/2006/relationships">
+  <p:cSld>
+    <p:spTree>
+      <p:nvGrpSpPr>
+        <p:cNvPr id="1" name=""/>
+        <p:cNvGrpSpPr/>
+        <p:nvPr/>
+      </p:nvGrpSpPr>
+      <p:grpSpPr/>
+      <p:sp>
+        <p:nvSpPr>
+          <p:cNvPr id="2" name="TextBox 1"/>
+          <p:cNvSpPr txBox="1"/>
+          <p:nvPr/>
+        </p:nvSpPr>
+        <p:spPr>
+          <a:xfrm>
+            <a:off x="914400" y="457200"/>
+            <a:ext cx="10058400" cy="914400"/>
+          </a:xfrm>
+          <a:prstGeom prst="rect">
+            <a:avLst/>
+          </a:prstGeom>
+          <a:noFill/>
+        </p:spPr>
+        <p:txBody>
+          <a:bodyPr wrap="none">
+            <a:spAutoFit/>
+          </a:bodyPr>
+          <a:lstStyle/>
+          <a:p>
+            <a:r>
+              <a:rPr sz="2800" b="1">
+                <a:solidFill>
+                  <a:srgbClr val="8B0000"/>
+                </a:solidFill>
+              </a:rPr>
+              <a:t>Python 代码示例</a:t>
+            </a:r>
+          </a:p>
+        </p:txBody>
+      </p:sp>
+      <p:sp>
+        <p:nvSpPr>
+          <p:cNvPr id="3" name="TextBox 2"/>
+          <p:cNvSpPr txBox="1"/>
+          <p:nvPr/>
+        </p:nvSpPr>
+        <p:spPr>
+          <a:xfrm>
+            <a:off x="914400" y="1371600"/>
+            <a:ext cx="10058400" cy="5029200"/>
+          </a:xfrm>
+          <a:prstGeom prst="rect">
+            <a:avLst/>
+          </a:prstGeom>
+          <a:noFill/>
+        </p:spPr>
+        <p:txBody>
+          <a:bodyPr wrap="none">
+            <a:spAutoFit/>
+          </a:bodyPr>
+          <a:lstStyle/>
+          <a:p/>
+          <a:p>
+            <a:r>
+              <a:rPr sz="1400">
+                <a:solidFill>
+                  <a:srgbClr val="000000"/>
+                </a:solidFill>
+              </a:rPr>
+              <a:t>def lowbit(x): return x &amp; -x
+def count_ones(x):
+    c = 0
+    while x: x -= x &amp; -x; c += 1
+    return c</a:t>
+            </a:r>
+          </a:p>
+        </p:txBody>
+      </p:sp>
+    </p:spTree>
+  </p:cSld>
+  <p:clrMapOvr>
+    <a:masterClrMapping/>
+  </p:clrMapOvr>
+</p:sld>
+</file>
+
+<file path=ppt/slides/slide6.xml><?xml version="1.0" encoding="utf-8"?>
+<p:sld xmlns:a="http://schemas.openxmlformats.org/drawingml/2006/main" xmlns:p="http://schemas.openxmlformats.org/presentationml/2006/main" xmlns:r="http://schemas.openxmlformats.org/officeDocument/2006/relationships">
+  <p:cSld>
+    <p:spTree>
+      <p:nvGrpSpPr>
+        <p:cNvPr id="1" name=""/>
+        <p:cNvGrpSpPr/>
+        <p:nvPr/>
+      </p:nvGrpSpPr>
+      <p:grpSpPr/>
+      <p:sp>
+        <p:nvSpPr>
+          <p:cNvPr id="2" name="TextBox 1"/>
+          <p:cNvSpPr txBox="1"/>
+          <p:nvPr/>
+        </p:nvSpPr>
+        <p:spPr>
+          <a:xfrm>
+            <a:off x="914400" y="457200"/>
+            <a:ext cx="10058400" cy="914400"/>
+          </a:xfrm>
+          <a:prstGeom prst="rect">
+            <a:avLst/>
+          </a:prstGeom>
+          <a:noFill/>
+        </p:spPr>
+        <p:txBody>
+          <a:bodyPr wrap="none">
+            <a:spAutoFit/>
+          </a:bodyPr>
+          <a:lstStyle/>
+          <a:p>
+            <a:r>
+              <a:rPr sz="2800" b="1">
+                <a:solidFill>
+                  <a:srgbClr val="8B0000"/>
+                </a:solidFill>
+              </a:rPr>
+              <a:t>常见错误</a:t>
+            </a:r>
+          </a:p>
+        </p:txBody>
+      </p:sp>
+      <p:sp>
+        <p:nvSpPr>
+          <p:cNvPr id="3" name="TextBox 2"/>
+          <p:cNvSpPr txBox="1"/>
+          <p:nvPr/>
+        </p:nvSpPr>
+        <p:spPr>
+          <a:xfrm>
+            <a:off x="914400" y="1371600"/>
+            <a:ext cx="10058400" cy="5029200"/>
+          </a:xfrm>
+          <a:prstGeom prst="rect">
+            <a:avLst/>
+          </a:prstGeom>
+          <a:noFill/>
+        </p:spPr>
+        <p:txBody>
+          <a:bodyPr wrap="none">
+            <a:spAutoFit/>
+          </a:bodyPr>
+          <a:lstStyle/>
+          <a:p/>
+          <a:p>
+            <a:r>
+              <a:rPr sz="1600">
+                <a:solidFill>
+                  <a:srgbClr val="000000"/>
+                </a:solidFill>
+              </a:rPr>
+              <a:t>位运算优先级低于比较运算符</a:t>
+            </a:r>
+          </a:p>
+          <a:p>
+            <a:r>
+              <a:rPr sz="1600">
+                <a:solidFill>
+                  <a:srgbClr val="000000"/>
+                </a:solidFill>
+              </a:rPr>
+              <a:t>负数的位运算结果</a:t>
+            </a:r>
+          </a:p>
+          <a:p>
+            <a:r>
+              <a:rPr sz="1600">
+                <a:solidFill>
+                  <a:srgbClr val="000000"/>
+                </a:solidFill>
+              </a:rPr>
+              <a:t>高精度乘法进位处理</a:t>
+            </a:r>
+          </a:p>
+          <a:p>
+            <a:r>
+              <a:rPr sz="1600">
+                <a:solidFill>
+                  <a:srgbClr val="000000"/>
+                </a:solidFill>
+              </a:rPr>
+              <a:t>双指针越界检查</a:t>
+            </a:r>
+          </a:p>
+        </p:txBody>
+      </p:sp>
+    </p:spTree>
+  </p:cSld>
+  <p:clrMapOvr>
+    <a:masterClrMapping/>
+  </p:clrMapOvr>
+</p:sld>
+</file>
+
+<file path=ppt/slides/slide7.xml><?xml version="1.0" encoding="utf-8"?>
+<p:sld xmlns:a="http://schemas.openxmlformats.org/drawingml/2006/main" xmlns:p="http://schemas.openxmlformats.org/presentationml/2006/main" xmlns:r="http://schemas.openxmlformats.org/officeDocument/2006/relationships">
+  <p:cSld>
+    <p:spTree>
+      <p:nvGrpSpPr>
+        <p:cNvPr id="1" name=""/>
+        <p:cNvGrpSpPr/>
+        <p:nvPr/>
+      </p:nvGrpSpPr>
+      <p:grpSpPr/>
+      <p:sp>
+        <p:nvSpPr>
+          <p:cNvPr id="2" name="TextBox 1"/>
+          <p:cNvSpPr txBox="1"/>
+          <p:nvPr/>
+        </p:nvSpPr>
+        <p:spPr>
+          <a:xfrm>
+            <a:off x="914400" y="457200"/>
+            <a:ext cx="10058400" cy="914400"/>
+          </a:xfrm>
+          <a:prstGeom prst="rect">
+            <a:avLst/>
+          </a:prstGeom>
+          <a:noFill/>
+        </p:spPr>
+        <p:txBody>
+          <a:bodyPr wrap="none">
+            <a:spAutoFit/>
+          </a:bodyPr>
+          <a:lstStyle/>
+          <a:p>
+            <a:r>
+              <a:rPr sz="2800" b="1">
+                <a:solidFill>
+                  <a:srgbClr val="8B0000"/>
+                </a:solidFill>
+              </a:rPr>
+              <a:t>练习题目</a:t>
+            </a:r>
+          </a:p>
+        </p:txBody>
+      </p:sp>
+      <p:sp>
+        <p:nvSpPr>
+          <p:cNvPr id="3" name="TextBox 2"/>
+          <p:cNvSpPr txBox="1"/>
+          <p:nvPr/>
+        </p:nvSpPr>
+        <p:spPr>
+          <a:xfrm>
+            <a:off x="914400" y="1371600"/>
+            <a:ext cx="10058400" cy="5029200"/>
+          </a:xfrm>
+          <a:prstGeom prst="rect">
+            <a:avLst/>
+          </a:prstGeom>
+          <a:noFill/>
+        </p:spPr>
+        <p:txBody>
+          <a:bodyPr wrap="none">
+            <a:spAutoFit/>
+          </a:bodyPr>
+          <a:lstStyle/>
+          <a:p/>
+          <a:p>
+            <a:r>
+              <a:rPr sz="1600">
+                <a:solidFill>
+                  <a:srgbClr val="000000"/>
+                </a:solidFill>
+              </a:rPr>
+              <a:t>JD109 铁壁识痕</a:t>
+            </a:r>
+          </a:p>
+          <a:p>
+            <a:r>
+              <a:rPr sz="1600">
+                <a:solidFill>
+                  <a:srgbClr val="000000"/>
+                </a:solidFill>
+              </a:rPr>
+              <a:t>JD110 万钧合一</a:t>
+            </a:r>
+          </a:p>
+          <a:p>
+            <a:r>
+              <a:rPr sz="1600">
+                <a:solidFill>
+                  <a:srgbClr val="000000"/>
+                </a:solidFill>
+              </a:rPr>
+              <a:t>JD116 双剑验序</a:t>
+            </a:r>
+          </a:p>
+        </p:txBody>
+      </p:sp>
+    </p:spTree>
+  </p:cSld>
+  <p:clrMapOvr>
+    <a:masterClrMapping/>
+  </p:clrMapOvr>
+</p:sld>
+</file>
+
+<file path=ppt/slides/slide8.xml><?xml version="1.0" encoding="utf-8"?>
+<p:sld xmlns:a="http://schemas.openxmlformats.org/drawingml/2006/main" xmlns:p="http://schemas.openxmlformats.org/presentationml/2006/main" xmlns:r="http://schemas.openxmlformats.org/officeDocument/2006/relationships">
+  <p:cSld>
+    <p:spTree>
+      <p:nvGrpSpPr>
+        <p:cNvPr id="1" name=""/>
+        <p:cNvGrpSpPr/>
+        <p:nvPr/>
+      </p:nvGrpSpPr>
+      <p:grpSpPr/>
+      <p:sp>
+        <p:nvSpPr>
+          <p:cNvPr id="2" name="TextBox 1"/>
+          <p:cNvSpPr txBox="1"/>
+          <p:nvPr/>
+        </p:nvSpPr>
+        <p:spPr>
+          <a:xfrm>
+            <a:off x="914400" y="457200"/>
+            <a:ext cx="10058400" cy="914400"/>
+          </a:xfrm>
+          <a:prstGeom prst="rect">
+            <a:avLst/>
+          </a:prstGeom>
+          <a:noFill/>
+        </p:spPr>
+        <p:txBody>
+          <a:bodyPr wrap="none">
+            <a:spAutoFit/>
+          </a:bodyPr>
+          <a:lstStyle/>
+          <a:p>
+            <a:r>
+              <a:rPr sz="2800" b="1">
+                <a:solidFill>
+                  <a:srgbClr val="8B0000"/>
+                </a:solidFill>
+              </a:rPr>
+              <a:t>本章小结</a:t>
+            </a:r>
+          </a:p>
+        </p:txBody>
+      </p:sp>
+      <p:sp>
+        <p:nvSpPr>
+          <p:cNvPr id="3" name="TextBox 2"/>
+          <p:cNvSpPr txBox="1"/>
+          <p:nvPr/>
+        </p:nvSpPr>
+        <p:spPr>
+          <a:xfrm>
+            <a:off x="914400" y="1371600"/>
+            <a:ext cx="10058400" cy="5029200"/>
+          </a:xfrm>
+          <a:prstGeom prst="rect">
+            <a:avLst/>
+          </a:prstGeom>
+          <a:noFill/>
+        </p:spPr>
+        <p:txBody>
+          <a:bodyPr wrap="none">
+            <a:spAutoFit/>
+          </a:bodyPr>
+          <a:lstStyle/>
+          <a:p/>
+          <a:p>
+            <a:r>
+              <a:rPr sz="1600">
+                <a:solidFill>
+                  <a:srgbClr val="000000"/>
+                </a:solidFill>
+              </a:rPr>
+              <a:t>掌握核心概念</a:t>
+            </a:r>
+          </a:p>
+          <a:p>
+            <a:r>
+              <a:rPr sz="1600">
+                <a:solidFill>
+                  <a:srgbClr val="000000"/>
+                </a:solidFill>
+              </a:rPr>
+              <a:t>多做练习</a:t>
+            </a:r>
+          </a:p>
+          <a:p>
+            <a:r>
+              <a:rPr sz="1600">
+                <a:solidFill>
+                  <a:srgbClr val="000000"/>
+                </a:solidFill>
+              </a:rPr>
+              <a:t>注意边界条件</a:t>
+            </a:r>
+          </a:p>
+          <a:p>
+            <a:r>
+              <a:rPr sz="1600">
+                <a:solidFill>
+                  <a:srgbClr val="000000"/>
+                </a:solidFill>
+              </a:rPr>
+              <a:t>理解算法思想而非死记代码</a:t>
             </a:r>
           </a:p>
         </p:txBody>

--- a/textbook/ppt/chapter10_ppt.pptx
+++ b/textbook/ppt/chapter10_ppt.pptx
@@ -12,7 +12,6 @@
     <p:sldId id="260" r:id="rId11"/>
     <p:sldId id="261" r:id="rId12"/>
     <p:sldId id="262" r:id="rId13"/>
-    <p:sldId id="263" r:id="rId14"/>
   </p:sldIdLst>
   <p:sldSz cx="12188952" cy="6858000" type="screen4x3"/>
   <p:notesSz cx="6858000" cy="9144000"/>
@@ -3124,18 +3123,7 @@
                   <a:srgbClr val="8B0000"/>
                 </a:solidFill>
               </a:rPr>
-              <a:t>第10章 千锤百炼</a:t>
-            </a:r>
-          </a:p>
-          <a:p>
-            <a:pPr algn="ctr"/>
-            <a:r>
-              <a:rPr sz="2400">
-                <a:solidFill>
-                  <a:srgbClr val="6B5D4D"/>
-                </a:solidFill>
-              </a:rPr>
-              <a:t>高精度与位运算</a:t>
+              <a:t>第10章</a:t>
             </a:r>
           </a:p>
         </p:txBody>
@@ -3166,8 +3154,8 @@
         </p:nvSpPr>
         <p:spPr>
           <a:xfrm>
-            <a:off x="914400" y="457200"/>
-            <a:ext cx="10058400" cy="914400"/>
+            <a:off x="457200" y="274320"/>
+            <a:ext cx="10972800" cy="731520"/>
           </a:xfrm>
           <a:prstGeom prst="rect">
             <a:avLst/>
@@ -3181,7 +3169,7 @@
           <a:lstStyle/>
           <a:p>
             <a:r>
-              <a:rPr sz="2800" b="1">
+              <a:rPr sz="2400" b="1">
                 <a:solidFill>
                   <a:srgbClr val="8B0000"/>
                 </a:solidFill>
@@ -3199,8 +3187,8 @@
         </p:nvSpPr>
         <p:spPr>
           <a:xfrm>
-            <a:off x="914400" y="1371600"/>
-            <a:ext cx="10058400" cy="4572000"/>
+            <a:off x="457200" y="1097280"/>
+            <a:ext cx="10972800" cy="5029200"/>
           </a:xfrm>
           <a:prstGeom prst="rect">
             <a:avLst/>
@@ -3215,26 +3203,42 @@
           <a:p/>
           <a:p>
             <a:r>
-              <a:rPr sz="1800"/>
-              <a:t>• 高精度加减乘除的基本概念与应用</a:t>
-            </a:r>
-          </a:p>
-          <a:p>
-            <a:r>
-              <a:rPr sz="1800"/>
-              <a:t>• 位运算基础的基本概念与应用</a:t>
-            </a:r>
-          </a:p>
-          <a:p>
-            <a:r>
-              <a:rPr sz="1800"/>
-              <a:t>• 双指针技巧的基本概念与应用</a:t>
-            </a:r>
-          </a:p>
-          <a:p>
-            <a:r>
-              <a:rPr sz="1800"/>
-              <a:t>• 滑动窗口的基本概念与应用</a:t>
+              <a:rPr sz="1400">
+                <a:solidFill>
+                  <a:srgbClr val="000000"/>
+                </a:solidFill>
+              </a:rPr>
+              <a:t>高精度：用数组存每一位，模拟竖式运算</a:t>
+            </a:r>
+          </a:p>
+          <a:p>
+            <a:r>
+              <a:rPr sz="1400">
+                <a:solidFill>
+                  <a:srgbClr val="000000"/>
+                </a:solidFill>
+              </a:rPr>
+              <a:t>位运算：&amp; (与)、| (或)、^ (异或)、~ (取反)</a:t>
+            </a:r>
+          </a:p>
+          <a:p>
+            <a:r>
+              <a:rPr sz="1400">
+                <a:solidFill>
+                  <a:srgbClr val="000000"/>
+                </a:solidFill>
+              </a:rPr>
+              <a:t>双指针：两个指针配合遍历，O(n)</a:t>
+            </a:r>
+          </a:p>
+          <a:p>
+            <a:r>
+              <a:rPr sz="1400">
+                <a:solidFill>
+                  <a:srgbClr val="000000"/>
+                </a:solidFill>
+              </a:rPr>
+              <a:t>滑动窗口：维护区间信息，左右指针</a:t>
             </a:r>
           </a:p>
         </p:txBody>
@@ -3265,8 +3269,8 @@
         </p:nvSpPr>
         <p:spPr>
           <a:xfrm>
-            <a:off x="914400" y="457200"/>
-            <a:ext cx="10058400" cy="914400"/>
+            <a:off x="457200" y="274320"/>
+            <a:ext cx="10972800" cy="731520"/>
           </a:xfrm>
           <a:prstGeom prst="rect">
             <a:avLst/>
@@ -3280,12 +3284,12 @@
           <a:lstStyle/>
           <a:p>
             <a:r>
-              <a:rPr sz="2800" b="1">
+              <a:rPr sz="2400" b="1">
                 <a:solidFill>
                   <a:srgbClr val="8B0000"/>
                 </a:solidFill>
               </a:rPr>
-              <a:t>本章概览</a:t>
+              <a:t>C++ 代码示例</a:t>
             </a:r>
           </a:p>
         </p:txBody>
@@ -3298,8 +3302,8 @@
         </p:nvSpPr>
         <p:spPr>
           <a:xfrm>
-            <a:off x="914400" y="1371600"/>
-            <a:ext cx="10058400" cy="5029200"/>
+            <a:off x="457200" y="1097280"/>
+            <a:ext cx="10972800" cy="5029200"/>
           </a:xfrm>
           <a:prstGeom prst="rect">
             <a:avLst/>
@@ -3314,42 +3318,23 @@
           <a:p/>
           <a:p>
             <a:r>
-              <a:rPr sz="1600">
+              <a:rPr sz="1200">
                 <a:solidFill>
                   <a:srgbClr val="000000"/>
                 </a:solidFill>
               </a:rPr>
-              <a:t>高精度：用数组存每一位，模拟竖式运算</a:t>
-            </a:r>
-          </a:p>
-          <a:p>
-            <a:r>
-              <a:rPr sz="1600">
-                <a:solidFill>
-                  <a:srgbClr val="000000"/>
-                </a:solidFill>
-              </a:rPr>
-              <a:t>位运算：&amp;、|、^、~、&lt;&lt;、&gt;&gt;</a:t>
-            </a:r>
-          </a:p>
-          <a:p>
-            <a:r>
-              <a:rPr sz="1600">
-                <a:solidFill>
-                  <a:srgbClr val="000000"/>
-                </a:solidFill>
-              </a:rPr>
-              <a:t>双指针：两个指针配合遍历</a:t>
-            </a:r>
-          </a:p>
-          <a:p>
-            <a:r>
-              <a:rPr sz="1600">
-                <a:solidFill>
-                  <a:srgbClr val="000000"/>
-                </a:solidFill>
-              </a:rPr>
-              <a:t>滑动窗口：维护区间信息</a:t>
+              <a:t>// 位运算：统计二进制中1的个数
+int count = 0;
+while (x &gt; 0) {
+    count += x &amp; 1;
+    x &gt;&gt;= 1;
+}
+// 双指针
+int i = 0, j = 0;
+while (i &lt; n &amp;&amp; j &lt; m) {
+    if (condition) i++;
+    else j++;
+}</a:t>
             </a:r>
           </a:p>
         </p:txBody>
@@ -3380,8 +3365,8 @@
         </p:nvSpPr>
         <p:spPr>
           <a:xfrm>
-            <a:off x="914400" y="457200"/>
-            <a:ext cx="10058400" cy="914400"/>
+            <a:off x="457200" y="274320"/>
+            <a:ext cx="10972800" cy="731520"/>
           </a:xfrm>
           <a:prstGeom prst="rect">
             <a:avLst/>
@@ -3395,12 +3380,12 @@
           <a:lstStyle/>
           <a:p>
             <a:r>
-              <a:rPr sz="2800" b="1">
+              <a:rPr sz="2400" b="1">
                 <a:solidFill>
                   <a:srgbClr val="8B0000"/>
                 </a:solidFill>
               </a:rPr>
-              <a:t>C++ 代码示例</a:t>
+              <a:t>Python 代码示例</a:t>
             </a:r>
           </a:p>
         </p:txBody>
@@ -3413,8 +3398,8 @@
         </p:nvSpPr>
         <p:spPr>
           <a:xfrm>
-            <a:off x="914400" y="1371600"/>
-            <a:ext cx="10058400" cy="5029200"/>
+            <a:off x="457200" y="1097280"/>
+            <a:ext cx="10972800" cy="5029200"/>
           </a:xfrm>
           <a:prstGeom prst="rect">
             <a:avLst/>
@@ -3429,15 +3414,24 @@
           <a:p/>
           <a:p>
             <a:r>
-              <a:rPr sz="1400">
+              <a:rPr sz="1200">
                 <a:solidFill>
                   <a:srgbClr val="000000"/>
                 </a:solidFill>
               </a:rPr>
-              <a:t>int lowbit(int x) { return x &amp; -x; }
-// 统计二进制中1的个数
-int count = 0;
-while (x) { x -= x &amp; -x; count++; }</a:t>
+              <a:t># 位运算：统计二进制中1的个数
+count = 0
+x = 42
+while x &gt; 0:
+    count += x &amp; 1
+    x &gt;&gt;= 1
+# 双指针
+i, j = 0, 0
+while i &lt; n and j &lt; m:
+    if condition:
+        i += 1
+    else:
+        j += 1</a:t>
             </a:r>
           </a:p>
         </p:txBody>
@@ -3468,8 +3462,8 @@
         </p:nvSpPr>
         <p:spPr>
           <a:xfrm>
-            <a:off x="914400" y="457200"/>
-            <a:ext cx="10058400" cy="914400"/>
+            <a:off x="457200" y="274320"/>
+            <a:ext cx="10972800" cy="731520"/>
           </a:xfrm>
           <a:prstGeom prst="rect">
             <a:avLst/>
@@ -3483,12 +3477,12 @@
           <a:lstStyle/>
           <a:p>
             <a:r>
-              <a:rPr sz="2800" b="1">
+              <a:rPr sz="2400" b="1">
                 <a:solidFill>
                   <a:srgbClr val="8B0000"/>
                 </a:solidFill>
               </a:rPr>
-              <a:t>Python 代码示例</a:t>
+              <a:t>常见错误</a:t>
             </a:r>
           </a:p>
         </p:txBody>
@@ -3501,8 +3495,8 @@
         </p:nvSpPr>
         <p:spPr>
           <a:xfrm>
-            <a:off x="914400" y="1371600"/>
-            <a:ext cx="10058400" cy="5029200"/>
+            <a:off x="457200" y="1097280"/>
+            <a:ext cx="10972800" cy="5029200"/>
           </a:xfrm>
           <a:prstGeom prst="rect">
             <a:avLst/>
@@ -3522,11 +3516,37 @@
                   <a:srgbClr val="000000"/>
                 </a:solidFill>
               </a:rPr>
-              <a:t>def lowbit(x): return x &amp; -x
-def count_ones(x):
-    c = 0
-    while x: x -= x &amp; -x; c += 1
-    return c</a:t>
+              <a:t>位运算优先级低于比较运算符！用括号：(a &gt;&gt; 2) &amp; 1</a:t>
+            </a:r>
+          </a:p>
+          <a:p>
+            <a:r>
+              <a:rPr sz="1400">
+                <a:solidFill>
+                  <a:srgbClr val="000000"/>
+                </a:solidFill>
+              </a:rPr>
+              <a:t>负数的位运算结果可能意外</a:t>
+            </a:r>
+          </a:p>
+          <a:p>
+            <a:r>
+              <a:rPr sz="1400">
+                <a:solidFill>
+                  <a:srgbClr val="000000"/>
+                </a:solidFill>
+              </a:rPr>
+              <a:t>高精度乘法进位处理要仔细</a:t>
+            </a:r>
+          </a:p>
+          <a:p>
+            <a:r>
+              <a:rPr sz="1400">
+                <a:solidFill>
+                  <a:srgbClr val="000000"/>
+                </a:solidFill>
+              </a:rPr>
+              <a:t>双指针越界检查</a:t>
             </a:r>
           </a:p>
         </p:txBody>
@@ -3557,8 +3577,8 @@
         </p:nvSpPr>
         <p:spPr>
           <a:xfrm>
-            <a:off x="914400" y="457200"/>
-            <a:ext cx="10058400" cy="914400"/>
+            <a:off x="457200" y="274320"/>
+            <a:ext cx="10972800" cy="731520"/>
           </a:xfrm>
           <a:prstGeom prst="rect">
             <a:avLst/>
@@ -3572,12 +3592,12 @@
           <a:lstStyle/>
           <a:p>
             <a:r>
-              <a:rPr sz="2800" b="1">
+              <a:rPr sz="2400" b="1">
                 <a:solidFill>
                   <a:srgbClr val="8B0000"/>
                 </a:solidFill>
               </a:rPr>
-              <a:t>常见错误</a:t>
+              <a:t>练习题目</a:t>
             </a:r>
           </a:p>
         </p:txBody>
@@ -3590,8 +3610,8 @@
         </p:nvSpPr>
         <p:spPr>
           <a:xfrm>
-            <a:off x="914400" y="1371600"/>
-            <a:ext cx="10058400" cy="5029200"/>
+            <a:off x="457200" y="1097280"/>
+            <a:ext cx="10972800" cy="5029200"/>
           </a:xfrm>
           <a:prstGeom prst="rect">
             <a:avLst/>
@@ -3606,42 +3626,32 @@
           <a:p/>
           <a:p>
             <a:r>
-              <a:rPr sz="1600">
+              <a:rPr sz="1400">
                 <a:solidFill>
                   <a:srgbClr val="000000"/>
                 </a:solidFill>
               </a:rPr>
-              <a:t>位运算优先级低于比较运算符</a:t>
-            </a:r>
-          </a:p>
-          <a:p>
-            <a:r>
-              <a:rPr sz="1600">
+              <a:t>JD109 铁壁识痕 - 二进制1的个数 (Easy)</a:t>
+            </a:r>
+          </a:p>
+          <a:p>
+            <a:r>
+              <a:rPr sz="1400">
                 <a:solidFill>
                   <a:srgbClr val="000000"/>
                 </a:solidFill>
               </a:rPr>
-              <a:t>负数的位运算结果</a:t>
-            </a:r>
-          </a:p>
-          <a:p>
-            <a:r>
-              <a:rPr sz="1600">
+              <a:t>JD110 万钧合一 - 高精度加法 (Medium)</a:t>
+            </a:r>
+          </a:p>
+          <a:p>
+            <a:r>
+              <a:rPr sz="1400">
                 <a:solidFill>
                   <a:srgbClr val="000000"/>
                 </a:solidFill>
               </a:rPr>
-              <a:t>高精度乘法进位处理</a:t>
-            </a:r>
-          </a:p>
-          <a:p>
-            <a:r>
-              <a:rPr sz="1600">
-                <a:solidFill>
-                  <a:srgbClr val="000000"/>
-                </a:solidFill>
-              </a:rPr>
-              <a:t>双指针越界检查</a:t>
+              <a:t>JD116 双剑验序 - 子序列判断 (Medium)</a:t>
             </a:r>
           </a:p>
         </p:txBody>
@@ -3672,8 +3682,8 @@
         </p:nvSpPr>
         <p:spPr>
           <a:xfrm>
-            <a:off x="914400" y="457200"/>
-            <a:ext cx="10058400" cy="914400"/>
+            <a:off x="457200" y="274320"/>
+            <a:ext cx="10972800" cy="731520"/>
           </a:xfrm>
           <a:prstGeom prst="rect">
             <a:avLst/>
@@ -3687,12 +3697,12 @@
           <a:lstStyle/>
           <a:p>
             <a:r>
-              <a:rPr sz="2800" b="1">
+              <a:rPr sz="2400" b="1">
                 <a:solidFill>
                   <a:srgbClr val="8B0000"/>
                 </a:solidFill>
               </a:rPr>
-              <a:t>练习题目</a:t>
+              <a:t>本章小结</a:t>
             </a:r>
           </a:p>
         </p:txBody>
@@ -3705,8 +3715,8 @@
         </p:nvSpPr>
         <p:spPr>
           <a:xfrm>
-            <a:off x="914400" y="1371600"/>
-            <a:ext cx="10058400" cy="5029200"/>
+            <a:off x="457200" y="1097280"/>
+            <a:ext cx="10972800" cy="5029200"/>
           </a:xfrm>
           <a:prstGeom prst="rect">
             <a:avLst/>
@@ -3721,147 +3731,42 @@
           <a:p/>
           <a:p>
             <a:r>
-              <a:rPr sz="1600">
+              <a:rPr sz="1400">
                 <a:solidFill>
                   <a:srgbClr val="000000"/>
                 </a:solidFill>
               </a:rPr>
-              <a:t>JD109 铁壁识痕</a:t>
-            </a:r>
-          </a:p>
-          <a:p>
-            <a:r>
-              <a:rPr sz="1600">
+              <a:t>本章学习了第10章的核心概念</a:t>
+            </a:r>
+          </a:p>
+          <a:p>
+            <a:r>
+              <a:rPr sz="1400">
                 <a:solidFill>
                   <a:srgbClr val="000000"/>
                 </a:solidFill>
               </a:rPr>
-              <a:t>JD110 万钧合一</a:t>
-            </a:r>
-          </a:p>
-          <a:p>
-            <a:r>
-              <a:rPr sz="1600">
+              <a:t>多做练习是掌握算法的关键</a:t>
+            </a:r>
+          </a:p>
+          <a:p>
+            <a:r>
+              <a:rPr sz="1400">
                 <a:solidFill>
                   <a:srgbClr val="000000"/>
                 </a:solidFill>
               </a:rPr>
-              <a:t>JD116 双剑验序</a:t>
-            </a:r>
-          </a:p>
-        </p:txBody>
-      </p:sp>
-    </p:spTree>
-  </p:cSld>
-  <p:clrMapOvr>
-    <a:masterClrMapping/>
-  </p:clrMapOvr>
-</p:sld>
-</file>
-
-<file path=ppt/slides/slide8.xml><?xml version="1.0" encoding="utf-8"?>
-<p:sld xmlns:a="http://schemas.openxmlformats.org/drawingml/2006/main" xmlns:p="http://schemas.openxmlformats.org/presentationml/2006/main" xmlns:r="http://schemas.openxmlformats.org/officeDocument/2006/relationships">
-  <p:cSld>
-    <p:spTree>
-      <p:nvGrpSpPr>
-        <p:cNvPr id="1" name=""/>
-        <p:cNvGrpSpPr/>
-        <p:nvPr/>
-      </p:nvGrpSpPr>
-      <p:grpSpPr/>
-      <p:sp>
-        <p:nvSpPr>
-          <p:cNvPr id="2" name="TextBox 1"/>
-          <p:cNvSpPr txBox="1"/>
-          <p:nvPr/>
-        </p:nvSpPr>
-        <p:spPr>
-          <a:xfrm>
-            <a:off x="914400" y="457200"/>
-            <a:ext cx="10058400" cy="914400"/>
-          </a:xfrm>
-          <a:prstGeom prst="rect">
-            <a:avLst/>
-          </a:prstGeom>
-          <a:noFill/>
-        </p:spPr>
-        <p:txBody>
-          <a:bodyPr wrap="none">
-            <a:spAutoFit/>
-          </a:bodyPr>
-          <a:lstStyle/>
-          <a:p>
-            <a:r>
-              <a:rPr sz="2800" b="1">
-                <a:solidFill>
-                  <a:srgbClr val="8B0000"/>
+              <a:t>理解算法思想比死记代码更重要</a:t>
+            </a:r>
+          </a:p>
+          <a:p>
+            <a:r>
+              <a:rPr sz="1400">
+                <a:solidFill>
+                  <a:srgbClr val="000000"/>
                 </a:solidFill>
               </a:rPr>
-              <a:t>本章小结</a:t>
-            </a:r>
-          </a:p>
-        </p:txBody>
-      </p:sp>
-      <p:sp>
-        <p:nvSpPr>
-          <p:cNvPr id="3" name="TextBox 2"/>
-          <p:cNvSpPr txBox="1"/>
-          <p:nvPr/>
-        </p:nvSpPr>
-        <p:spPr>
-          <a:xfrm>
-            <a:off x="914400" y="1371600"/>
-            <a:ext cx="10058400" cy="5029200"/>
-          </a:xfrm>
-          <a:prstGeom prst="rect">
-            <a:avLst/>
-          </a:prstGeom>
-          <a:noFill/>
-        </p:spPr>
-        <p:txBody>
-          <a:bodyPr wrap="none">
-            <a:spAutoFit/>
-          </a:bodyPr>
-          <a:lstStyle/>
-          <a:p/>
-          <a:p>
-            <a:r>
-              <a:rPr sz="1600">
-                <a:solidFill>
-                  <a:srgbClr val="000000"/>
-                </a:solidFill>
-              </a:rPr>
-              <a:t>掌握核心概念</a:t>
-            </a:r>
-          </a:p>
-          <a:p>
-            <a:r>
-              <a:rPr sz="1600">
-                <a:solidFill>
-                  <a:srgbClr val="000000"/>
-                </a:solidFill>
-              </a:rPr>
-              <a:t>多做练习</a:t>
-            </a:r>
-          </a:p>
-          <a:p>
-            <a:r>
-              <a:rPr sz="1600">
-                <a:solidFill>
-                  <a:srgbClr val="000000"/>
-                </a:solidFill>
-              </a:rPr>
-              <a:t>注意边界条件</a:t>
-            </a:r>
-          </a:p>
-          <a:p>
-            <a:r>
-              <a:rPr sz="1600">
-                <a:solidFill>
-                  <a:srgbClr val="000000"/>
-                </a:solidFill>
-              </a:rPr>
-              <a:t>理解算法思想而非死记代码</a:t>
+              <a:t>遇到问题先画图、再想算法、最后写代码</a:t>
             </a:r>
           </a:p>
         </p:txBody>

--- a/textbook/ppt/chapter10_ppt.pptx
+++ b/textbook/ppt/chapter10_ppt.pptx
@@ -12,6 +12,7 @@
     <p:sldId id="260" r:id="rId11"/>
     <p:sldId id="261" r:id="rId12"/>
     <p:sldId id="262" r:id="rId13"/>
+    <p:sldId id="263" r:id="rId14"/>
   </p:sldIdLst>
   <p:sldSz cx="12188952" cy="6858000" type="screen4x3"/>
   <p:notesSz cx="6858000" cy="9144000"/>
@@ -3651,7 +3652,7 @@
                   <a:srgbClr val="000000"/>
                 </a:solidFill>
               </a:rPr>
-              <a:t>JD116 双剑验序 - 子序列判断 (Medium)</a:t>
+              <a:t>JD116 无重之最 - 子序列判断 (Medium)</a:t>
             </a:r>
           </a:p>
         </p:txBody>
@@ -3767,6 +3768,91 @@
                 </a:solidFill>
               </a:rPr>
               <a:t>遇到问题先画图、再想算法、最后写代码</a:t>
+            </a:r>
+          </a:p>
+        </p:txBody>
+      </p:sp>
+    </p:spTree>
+  </p:cSld>
+  <p:clrMapOvr>
+    <a:masterClrMapping/>
+  </p:clrMapOvr>
+</p:sld>
+</file>
+
+<file path=ppt/slides/slide8.xml><?xml version="1.0" encoding="utf-8"?>
+<p:sld xmlns:a="http://schemas.openxmlformats.org/drawingml/2006/main" xmlns:p="http://schemas.openxmlformats.org/presentationml/2006/main" xmlns:r="http://schemas.openxmlformats.org/officeDocument/2006/relationships">
+  <p:cSld>
+    <p:spTree>
+      <p:nvGrpSpPr>
+        <p:cNvPr id="1" name=""/>
+        <p:cNvGrpSpPr/>
+        <p:nvPr/>
+      </p:nvGrpSpPr>
+      <p:grpSpPr/>
+      <p:sp>
+        <p:nvSpPr>
+          <p:cNvPr id="2" name="TextBox 1"/>
+          <p:cNvSpPr txBox="1"/>
+          <p:nvPr/>
+        </p:nvSpPr>
+        <p:spPr>
+          <a:xfrm>
+            <a:off x="457200" y="274320"/>
+            <a:ext cx="10972800" cy="731520"/>
+          </a:xfrm>
+          <a:prstGeom prst="rect">
+            <a:avLst/>
+          </a:prstGeom>
+          <a:noFill/>
+        </p:spPr>
+        <p:txBody>
+          <a:bodyPr wrap="none">
+            <a:spAutoFit/>
+          </a:bodyPr>
+          <a:lstStyle/>
+          <a:p>
+            <a:r>
+              <a:rPr sz="2400" b="1">
+                <a:solidFill>
+                  <a:srgbClr val="8B0000"/>
+                </a:solidFill>
+              </a:rPr>
+              <a:t>本章概览</a:t>
+            </a:r>
+          </a:p>
+        </p:txBody>
+      </p:sp>
+      <p:sp>
+        <p:nvSpPr>
+          <p:cNvPr id="3" name="TextBox 2"/>
+          <p:cNvSpPr txBox="1"/>
+          <p:nvPr/>
+        </p:nvSpPr>
+        <p:spPr>
+          <a:xfrm>
+            <a:off x="457200" y="1097280"/>
+            <a:ext cx="10972800" cy="5029200"/>
+          </a:xfrm>
+          <a:prstGeom prst="rect">
+            <a:avLst/>
+          </a:prstGeom>
+          <a:noFill/>
+        </p:spPr>
+        <p:txBody>
+          <a:bodyPr wrap="none">
+            <a:spAutoFit/>
+          </a:bodyPr>
+          <a:lstStyle/>
+          <a:p/>
+          <a:p>
+            <a:r>
+              <a:rPr sz="1600">
+                <a:solidFill>
+                  <a:srgbClr val="000000"/>
+                </a:solidFill>
+              </a:rPr>
+              <a:t>本章学习高精度运算和位运算——处理超大整数和二进制操作。</a:t>
             </a:r>
           </a:p>
         </p:txBody>

--- a/textbook/ppt/chapter10_ppt.pptx
+++ b/textbook/ppt/chapter10_ppt.pptx
@@ -13,6 +13,7 @@
     <p:sldId id="261" r:id="rId12"/>
     <p:sldId id="262" r:id="rId13"/>
     <p:sldId id="263" r:id="rId14"/>
+    <p:sldId id="264" r:id="rId15"/>
   </p:sldIdLst>
   <p:sldSz cx="12188952" cy="6858000" type="screen4x3"/>
   <p:notesSz cx="6858000" cy="9144000"/>
@@ -3737,7 +3738,7 @@
                   <a:srgbClr val="000000"/>
                 </a:solidFill>
               </a:rPr>
-              <a:t>本章学习了第10章的核心概念</a:t>
+              <a:t/>
             </a:r>
           </a:p>
           <a:p>
@@ -3747,7 +3748,7 @@
                   <a:srgbClr val="000000"/>
                 </a:solidFill>
               </a:rPr>
-              <a:t>多做练习是掌握算法的关键</a:t>
+              <a:t/>
             </a:r>
           </a:p>
           <a:p>
@@ -3757,7 +3758,7 @@
                   <a:srgbClr val="000000"/>
                 </a:solidFill>
               </a:rPr>
-              <a:t>理解算法思想比死记代码更重要</a:t>
+              <a:t/>
             </a:r>
           </a:p>
           <a:p>
@@ -3767,7 +3768,7 @@
                   <a:srgbClr val="000000"/>
                 </a:solidFill>
               </a:rPr>
-              <a:t>遇到问题先画图、再想算法、最后写代码</a:t>
+              <a:t/>
             </a:r>
           </a:p>
         </p:txBody>
@@ -3853,6 +3854,121 @@
                 </a:solidFill>
               </a:rPr>
               <a:t>本章学习高精度运算和位运算——处理超大整数和二进制操作。</a:t>
+            </a:r>
+          </a:p>
+        </p:txBody>
+      </p:sp>
+    </p:spTree>
+  </p:cSld>
+  <p:clrMapOvr>
+    <a:masterClrMapping/>
+  </p:clrMapOvr>
+</p:sld>
+</file>
+
+<file path=ppt/slides/slide9.xml><?xml version="1.0" encoding="utf-8"?>
+<p:sld xmlns:a="http://schemas.openxmlformats.org/drawingml/2006/main" xmlns:p="http://schemas.openxmlformats.org/presentationml/2006/main" xmlns:r="http://schemas.openxmlformats.org/officeDocument/2006/relationships">
+  <p:cSld>
+    <p:spTree>
+      <p:nvGrpSpPr>
+        <p:cNvPr id="1" name=""/>
+        <p:cNvGrpSpPr/>
+        <p:nvPr/>
+      </p:nvGrpSpPr>
+      <p:grpSpPr/>
+      <p:sp>
+        <p:nvSpPr>
+          <p:cNvPr id="2" name="TextBox 1"/>
+          <p:cNvSpPr txBox="1"/>
+          <p:nvPr/>
+        </p:nvSpPr>
+        <p:spPr>
+          <a:xfrm>
+            <a:off x="457200" y="274320"/>
+            <a:ext cx="10972800" cy="731520"/>
+          </a:xfrm>
+          <a:prstGeom prst="rect">
+            <a:avLst/>
+          </a:prstGeom>
+          <a:noFill/>
+        </p:spPr>
+        <p:txBody>
+          <a:bodyPr wrap="none">
+            <a:spAutoFit/>
+          </a:bodyPr>
+          <a:lstStyle/>
+          <a:p>
+            <a:r>
+              <a:rPr sz="2400" b="1">
+                <a:solidFill>
+                  <a:srgbClr val="8B0000"/>
+                </a:solidFill>
+              </a:rPr>
+              <a:t>第10章 核心要点</a:t>
+            </a:r>
+          </a:p>
+        </p:txBody>
+      </p:sp>
+      <p:sp>
+        <p:nvSpPr>
+          <p:cNvPr id="3" name="TextBox 2"/>
+          <p:cNvSpPr txBox="1"/>
+          <p:nvPr/>
+        </p:nvSpPr>
+        <p:spPr>
+          <a:xfrm>
+            <a:off x="457200" y="1097280"/>
+            <a:ext cx="10972800" cy="5029200"/>
+          </a:xfrm>
+          <a:prstGeom prst="rect">
+            <a:avLst/>
+          </a:prstGeom>
+          <a:noFill/>
+        </p:spPr>
+        <p:txBody>
+          <a:bodyPr wrap="none">
+            <a:spAutoFit/>
+          </a:bodyPr>
+          <a:lstStyle/>
+          <a:p/>
+          <a:p>
+            <a:r>
+              <a:rPr sz="1600">
+                <a:solidFill>
+                  <a:srgbClr val="000000"/>
+                </a:solidFill>
+              </a:rPr>
+              <a:t>• 高精度运算的数组模拟</a:t>
+            </a:r>
+          </a:p>
+          <a:p>
+            <a:r>
+              <a:rPr sz="1600">
+                <a:solidFill>
+                  <a:srgbClr val="000000"/>
+                </a:solidFill>
+              </a:rPr>
+              <a:t>• 位运算的基本操作</a:t>
+            </a:r>
+          </a:p>
+          <a:p>
+            <a:r>
+              <a:rPr sz="1600">
+                <a:solidFill>
+                  <a:srgbClr val="000000"/>
+                </a:solidFill>
+              </a:rPr>
+              <a:t>• 双指针的两种模式</a:t>
+            </a:r>
+          </a:p>
+          <a:p>
+            <a:r>
+              <a:rPr sz="1600">
+                <a:solidFill>
+                  <a:srgbClr val="000000"/>
+                </a:solidFill>
+              </a:rPr>
+              <a:t>• 滑动窗口的维护</a:t>
             </a:r>
           </a:p>
         </p:txBody>
